--- a/26-dars - Ma'lumotlar bazasini boshqarish tizimlari (MBBT)/26-dars - Slayd.pptx
+++ b/26-dars - Ma'lumotlar bazasini boshqarish tizimlari (MBBT)/26-dars - Slayd.pptx
@@ -4078,7 +4078,7 @@
                 <a:ea typeface="Calibri" pitchFamily="34" charset="-122"/>
                 <a:cs typeface="Calibri" pitchFamily="34" charset="-120"/>
               </a:rPr>
-              <a:t>MS Access'да yangi ma'lumotlar bazasi yarat.</a:t>
+              <a:t>MS Access'da yangi ma'lumotlar bazasi yarat.</a:t>
             </a:r>
             <a:endParaRPr lang="en-US" sz="1350" dirty="0"/>
           </a:p>
@@ -4280,7 +4280,7 @@
                 <a:ea typeface="Calibri" pitchFamily="34" charset="-122"/>
                 <a:cs typeface="Calibri" pitchFamily="34" charset="-120"/>
               </a:rPr>
-              <a:t>Har bir maydonга to'g'ri tur tanla.</a:t>
+              <a:t>Har bir maydonga to'g'ri tur tanla.</a:t>
             </a:r>
             <a:endParaRPr lang="en-US" sz="1350" dirty="0"/>
           </a:p>
@@ -4381,7 +4381,7 @@
                 <a:ea typeface="Calibri" pitchFamily="34" charset="-122"/>
                 <a:cs typeface="Calibri" pitchFamily="34" charset="-120"/>
               </a:rPr>
-              <a:t>5 ta sinfdoshing ma'lumotини jadvalга kirit.</a:t>
+              <a:t>5 ta sinfdoshing ma'lumotini jadvalga kirit.</a:t>
             </a:r>
             <a:endParaRPr lang="en-US" sz="1350" dirty="0"/>
           </a:p>
@@ -4962,7 +4962,7 @@
                 <a:ea typeface="Calibri" pitchFamily="34" charset="-122"/>
                 <a:cs typeface="Calibri" pitchFamily="34" charset="-120"/>
               </a:rPr>
-              <a:t>Maydon turlariга misol keltiring.</a:t>
+              <a:t>Maydon turlariga misol keltiring.</a:t>
             </a:r>
             <a:endParaRPr lang="en-US" sz="1300" dirty="0"/>
           </a:p>
@@ -5096,7 +5096,7 @@
                 <a:ea typeface="Calibri" pitchFamily="34" charset="-122"/>
                 <a:cs typeface="Calibri" pitchFamily="34" charset="-120"/>
               </a:rPr>
-              <a:t>Sevimli kitoblaringiz uchun Access bazаси tuzing: nomi, muallifi, yili va janri maydonlari bilan.</a:t>
+              <a:t>Sevimli kitoblaringiz uchun Access bazasi tuzing: nomi, muallifi, yili va janri maydonlari bilan.</a:t>
             </a:r>
             <a:endParaRPr lang="en-US" sz="1450" dirty="0"/>
           </a:p>
